--- a/schools-presentations/B Gymnasiou/B41M2 - Εργασία με Υπολογιστικά Φύλλα.pptx
+++ b/schools-presentations/B Gymnasiou/B41M2 - Εργασία με Υπολογιστικά Φύλλα.pptx
@@ -13,7 +13,6 @@
     <p:sldId id="267" r:id="rId7"/>
     <p:sldId id="268" r:id="rId8"/>
     <p:sldId id="260" r:id="rId9"/>
-    <p:sldId id="263" r:id="rId10"/>
   </p:sldIdLst>
   <p:sldSz cx="12192000" cy="6858000"/>
   <p:notesSz cx="6858000" cy="9144000"/>
@@ -120,664 +119,21 @@
 </p:presentation>
 </file>
 
-<file path=ppt/revisionInfo.xml><?xml version="1.0" encoding="utf-8"?>
-<p1510:revInfo xmlns:a="http://schemas.openxmlformats.org/drawingml/2006/main" xmlns:r="http://schemas.openxmlformats.org/officeDocument/2006/relationships" xmlns:p1510="http://schemas.microsoft.com/office/powerpoint/2015/10/main">
-  <p1510:revLst>
-    <p1510:client id="{25D75829-2E2B-4803-9D7B-2244E29787E6}" v="14" dt="2026-09-13T07:43:58.637"/>
-  </p1510:revLst>
-</p1510:revInfo>
-</file>
-
 <file path=ppt/changesInfos/changesInfo1.xml><?xml version="1.0" encoding="utf-8"?>
 <pc:chgInfo xmlns:a="http://schemas.openxmlformats.org/drawingml/2006/main" xmlns:r="http://schemas.openxmlformats.org/officeDocument/2006/relationships" xmlns:ac="http://schemas.microsoft.com/office/drawing/2013/main/command" xmlns:pc="http://schemas.microsoft.com/office/powerpoint/2013/main/command">
   <pc:docChgLst>
-    <pc:chgData name="Άριστος Αρέστη" userId="813aa191-2d4c-464f-9d05-0a7e494d859f" providerId="ADAL" clId="{25D75829-2E2B-4803-9D7B-2244E29787E6}"/>
-    <pc:docChg chg="undo custSel addSld delSld modSld">
-      <pc:chgData name="Άριστος Αρέστη" userId="813aa191-2d4c-464f-9d05-0a7e494d859f" providerId="ADAL" clId="{25D75829-2E2B-4803-9D7B-2244E29787E6}" dt="2026-09-14T08:50:28.513" v="249" actId="113"/>
+    <pc:chgData name="Άριστος Αρέστη" userId="813aa191-2d4c-464f-9d05-0a7e494d859f" providerId="ADAL" clId="{49C7B61D-1ACF-4AFF-A04E-A3B433E32474}"/>
+    <pc:docChg chg="delSld">
+      <pc:chgData name="Άριστος Αρέστη" userId="813aa191-2d4c-464f-9d05-0a7e494d859f" providerId="ADAL" clId="{49C7B61D-1ACF-4AFF-A04E-A3B433E32474}" dt="2026-10-22T18:37:17.437" v="0" actId="47"/>
       <pc:docMkLst>
         <pc:docMk/>
       </pc:docMkLst>
-      <pc:sldChg chg="modSp">
-        <pc:chgData name="Άριστος Αρέστη" userId="813aa191-2d4c-464f-9d05-0a7e494d859f" providerId="ADAL" clId="{25D75829-2E2B-4803-9D7B-2244E29787E6}" dt="2026-09-10T14:03:12.569" v="130" actId="207"/>
-        <pc:sldMkLst>
-          <pc:docMk/>
-          <pc:sldMk cId="3019854637" sldId="256"/>
-        </pc:sldMkLst>
-        <pc:spChg chg="mod">
-          <ac:chgData name="Άριστος Αρέστη" userId="813aa191-2d4c-464f-9d05-0a7e494d859f" providerId="ADAL" clId="{25D75829-2E2B-4803-9D7B-2244E29787E6}" dt="2026-09-10T14:03:12.569" v="130" actId="207"/>
-          <ac:spMkLst>
-            <pc:docMk/>
-            <pc:sldMk cId="3019854637" sldId="256"/>
-            <ac:spMk id="2" creationId="{36571B63-82A4-FC3D-9860-20F38F123861}"/>
-          </ac:spMkLst>
-        </pc:spChg>
-      </pc:sldChg>
       <pc:sldChg chg="del">
-        <pc:chgData name="Άριστος Αρέστη" userId="813aa191-2d4c-464f-9d05-0a7e494d859f" providerId="ADAL" clId="{25D75829-2E2B-4803-9D7B-2244E29787E6}" dt="2026-09-05T07:07:13.059" v="0" actId="47"/>
-        <pc:sldMkLst>
-          <pc:docMk/>
-          <pc:sldMk cId="4279378956" sldId="257"/>
-        </pc:sldMkLst>
-      </pc:sldChg>
-      <pc:sldChg chg="delSp modSp mod setBg delDesignElem">
-        <pc:chgData name="Άριστος Αρέστη" userId="813aa191-2d4c-464f-9d05-0a7e494d859f" providerId="ADAL" clId="{25D75829-2E2B-4803-9D7B-2244E29787E6}" dt="2026-09-13T07:50:05.904" v="241" actId="5793"/>
-        <pc:sldMkLst>
-          <pc:docMk/>
-          <pc:sldMk cId="3815878654" sldId="260"/>
-        </pc:sldMkLst>
-        <pc:spChg chg="mod">
-          <ac:chgData name="Άριστος Αρέστη" userId="813aa191-2d4c-464f-9d05-0a7e494d859f" providerId="ADAL" clId="{25D75829-2E2B-4803-9D7B-2244E29787E6}" dt="2026-09-10T14:04:13.713" v="141" actId="113"/>
-          <ac:spMkLst>
-            <pc:docMk/>
-            <pc:sldMk cId="3815878654" sldId="260"/>
-            <ac:spMk id="2" creationId="{63F1E7BB-CB22-80D1-6F93-1729B7732AD6}"/>
-          </ac:spMkLst>
-        </pc:spChg>
-        <pc:spChg chg="mod">
-          <ac:chgData name="Άριστος Αρέστη" userId="813aa191-2d4c-464f-9d05-0a7e494d859f" providerId="ADAL" clId="{25D75829-2E2B-4803-9D7B-2244E29787E6}" dt="2026-09-13T07:50:05.904" v="241" actId="5793"/>
-          <ac:spMkLst>
-            <pc:docMk/>
-            <pc:sldMk cId="3815878654" sldId="260"/>
-            <ac:spMk id="3" creationId="{7CB06FC5-E736-C4C3-A851-1BF6C398AE90}"/>
-          </ac:spMkLst>
-        </pc:spChg>
-        <pc:spChg chg="del">
-          <ac:chgData name="Άριστος Αρέστη" userId="813aa191-2d4c-464f-9d05-0a7e494d859f" providerId="ADAL" clId="{25D75829-2E2B-4803-9D7B-2244E29787E6}" dt="2026-09-10T14:04:04.138" v="138"/>
-          <ac:spMkLst>
-            <pc:docMk/>
-            <pc:sldMk cId="3815878654" sldId="260"/>
-            <ac:spMk id="1033" creationId="{D009D6D5-DAC2-4A8B-A17A-E206B9012D09}"/>
-          </ac:spMkLst>
-        </pc:spChg>
-      </pc:sldChg>
-      <pc:sldChg chg="modSp mod">
-        <pc:chgData name="Άριστος Αρέστη" userId="813aa191-2d4c-464f-9d05-0a7e494d859f" providerId="ADAL" clId="{25D75829-2E2B-4803-9D7B-2244E29787E6}" dt="2026-09-13T07:50:12.906" v="243" actId="5793"/>
+        <pc:chgData name="Άριστος Αρέστη" userId="813aa191-2d4c-464f-9d05-0a7e494d859f" providerId="ADAL" clId="{49C7B61D-1ACF-4AFF-A04E-A3B433E32474}" dt="2026-10-22T18:37:17.437" v="0" actId="47"/>
         <pc:sldMkLst>
           <pc:docMk/>
           <pc:sldMk cId="608684808" sldId="263"/>
         </pc:sldMkLst>
-        <pc:spChg chg="mod">
-          <ac:chgData name="Άριστος Αρέστη" userId="813aa191-2d4c-464f-9d05-0a7e494d859f" providerId="ADAL" clId="{25D75829-2E2B-4803-9D7B-2244E29787E6}" dt="2026-09-10T14:04:27.148" v="144" actId="113"/>
-          <ac:spMkLst>
-            <pc:docMk/>
-            <pc:sldMk cId="608684808" sldId="263"/>
-            <ac:spMk id="2" creationId="{4C4AE698-8678-D891-4A6F-29AB7E3B2063}"/>
-          </ac:spMkLst>
-        </pc:spChg>
-        <pc:spChg chg="mod">
-          <ac:chgData name="Άριστος Αρέστη" userId="813aa191-2d4c-464f-9d05-0a7e494d859f" providerId="ADAL" clId="{25D75829-2E2B-4803-9D7B-2244E29787E6}" dt="2026-09-13T07:50:12.906" v="243" actId="5793"/>
-          <ac:spMkLst>
-            <pc:docMk/>
-            <pc:sldMk cId="608684808" sldId="263"/>
-            <ac:spMk id="3" creationId="{CB04EA9D-51CA-E692-F388-D50BE1527C6F}"/>
-          </ac:spMkLst>
-        </pc:spChg>
-      </pc:sldChg>
-      <pc:sldChg chg="addSp delSp modSp mod">
-        <pc:chgData name="Άριστος Αρέστη" userId="813aa191-2d4c-464f-9d05-0a7e494d859f" providerId="ADAL" clId="{25D75829-2E2B-4803-9D7B-2244E29787E6}" dt="2026-09-13T07:44:23.074" v="228" actId="14100"/>
-        <pc:sldMkLst>
-          <pc:docMk/>
-          <pc:sldMk cId="2026847565" sldId="264"/>
-        </pc:sldMkLst>
-        <pc:spChg chg="del mod">
-          <ac:chgData name="Άριστος Αρέστη" userId="813aa191-2d4c-464f-9d05-0a7e494d859f" providerId="ADAL" clId="{25D75829-2E2B-4803-9D7B-2244E29787E6}" dt="2026-09-13T07:44:14.695" v="225" actId="478"/>
-          <ac:spMkLst>
-            <pc:docMk/>
-            <pc:sldMk cId="2026847565" sldId="264"/>
-            <ac:spMk id="2" creationId="{657759B8-F883-AF39-A232-3F38E0FBC22C}"/>
-          </ac:spMkLst>
-        </pc:spChg>
-        <pc:spChg chg="add del">
-          <ac:chgData name="Άριστος Αρέστη" userId="813aa191-2d4c-464f-9d05-0a7e494d859f" providerId="ADAL" clId="{25D75829-2E2B-4803-9D7B-2244E29787E6}" dt="2026-09-13T07:43:58.637" v="223"/>
-          <ac:spMkLst>
-            <pc:docMk/>
-            <pc:sldMk cId="2026847565" sldId="264"/>
-            <ac:spMk id="3" creationId="{8FAA1EC4-0934-1B70-715B-FE7FC2471050}"/>
-          </ac:spMkLst>
-        </pc:spChg>
-        <pc:spChg chg="add del mod">
-          <ac:chgData name="Άριστος Αρέστη" userId="813aa191-2d4c-464f-9d05-0a7e494d859f" providerId="ADAL" clId="{25D75829-2E2B-4803-9D7B-2244E29787E6}" dt="2026-09-13T07:44:17.138" v="226" actId="478"/>
-          <ac:spMkLst>
-            <pc:docMk/>
-            <pc:sldMk cId="2026847565" sldId="264"/>
-            <ac:spMk id="7" creationId="{58BEF4E5-E87A-5D3C-BBC7-E6ED725168D3}"/>
-          </ac:spMkLst>
-        </pc:spChg>
-        <pc:picChg chg="add mod">
-          <ac:chgData name="Άριστος Αρέστη" userId="813aa191-2d4c-464f-9d05-0a7e494d859f" providerId="ADAL" clId="{25D75829-2E2B-4803-9D7B-2244E29787E6}" dt="2026-09-13T07:44:23.074" v="228" actId="14100"/>
-          <ac:picMkLst>
-            <pc:docMk/>
-            <pc:sldMk cId="2026847565" sldId="264"/>
-            <ac:picMk id="5" creationId="{D6D01A9A-B9EB-11DC-9526-69AE5BCF2D6F}"/>
-          </ac:picMkLst>
-        </pc:picChg>
-        <pc:picChg chg="del">
-          <ac:chgData name="Άριστος Αρέστη" userId="813aa191-2d4c-464f-9d05-0a7e494d859f" providerId="ADAL" clId="{25D75829-2E2B-4803-9D7B-2244E29787E6}" dt="2026-09-13T07:43:53.192" v="221" actId="478"/>
-          <ac:picMkLst>
-            <pc:docMk/>
-            <pc:sldMk cId="2026847565" sldId="264"/>
-            <ac:picMk id="8" creationId="{CD170797-3798-34CF-9D41-28BD780D5884}"/>
-          </ac:picMkLst>
-        </pc:picChg>
-      </pc:sldChg>
-      <pc:sldChg chg="addSp delSp modSp mod">
-        <pc:chgData name="Άριστος Αρέστη" userId="813aa191-2d4c-464f-9d05-0a7e494d859f" providerId="ADAL" clId="{25D75829-2E2B-4803-9D7B-2244E29787E6}" dt="2026-09-13T07:32:54.039" v="218" actId="108"/>
-        <pc:sldMkLst>
-          <pc:docMk/>
-          <pc:sldMk cId="2133937481" sldId="265"/>
-        </pc:sldMkLst>
-        <pc:spChg chg="mod">
-          <ac:chgData name="Άριστος Αρέστη" userId="813aa191-2d4c-464f-9d05-0a7e494d859f" providerId="ADAL" clId="{25D75829-2E2B-4803-9D7B-2244E29787E6}" dt="2026-09-10T14:03:33.516" v="133" actId="207"/>
-          <ac:spMkLst>
-            <pc:docMk/>
-            <pc:sldMk cId="2133937481" sldId="265"/>
-            <ac:spMk id="2" creationId="{657759B8-F883-AF39-A232-3F38E0FBC22C}"/>
-          </ac:spMkLst>
-        </pc:spChg>
-        <pc:spChg chg="add mod">
-          <ac:chgData name="Άριστος Αρέστη" userId="813aa191-2d4c-464f-9d05-0a7e494d859f" providerId="ADAL" clId="{25D75829-2E2B-4803-9D7B-2244E29787E6}" dt="2026-09-13T07:30:26.084" v="196" actId="6549"/>
-          <ac:spMkLst>
-            <pc:docMk/>
-            <pc:sldMk cId="2133937481" sldId="265"/>
-            <ac:spMk id="5" creationId="{6E8660A0-3084-F669-0D34-4095C6B78CD7}"/>
-          </ac:spMkLst>
-        </pc:spChg>
-        <pc:spChg chg="add mod">
-          <ac:chgData name="Άριστος Αρέστη" userId="813aa191-2d4c-464f-9d05-0a7e494d859f" providerId="ADAL" clId="{25D75829-2E2B-4803-9D7B-2244E29787E6}" dt="2026-09-13T07:32:54.039" v="218" actId="108"/>
-          <ac:spMkLst>
-            <pc:docMk/>
-            <pc:sldMk cId="2133937481" sldId="265"/>
-            <ac:spMk id="10" creationId="{330756F2-0DD1-ADD7-62D1-E0CEEBB17EA7}"/>
-          </ac:spMkLst>
-        </pc:spChg>
-        <pc:picChg chg="add del mod">
-          <ac:chgData name="Άριστος Αρέστη" userId="813aa191-2d4c-464f-9d05-0a7e494d859f" providerId="ADAL" clId="{25D75829-2E2B-4803-9D7B-2244E29787E6}" dt="2026-09-13T07:31:41.584" v="201" actId="478"/>
-          <ac:picMkLst>
-            <pc:docMk/>
-            <pc:sldMk cId="2133937481" sldId="265"/>
-            <ac:picMk id="4" creationId="{ACD7F2FB-70D6-4795-BEB4-29D51F8D76BC}"/>
-          </ac:picMkLst>
-        </pc:picChg>
-        <pc:picChg chg="del">
-          <ac:chgData name="Άριστος Αρέστη" userId="813aa191-2d4c-464f-9d05-0a7e494d859f" providerId="ADAL" clId="{25D75829-2E2B-4803-9D7B-2244E29787E6}" dt="2026-09-05T07:18:44.466" v="3" actId="478"/>
-          <ac:picMkLst>
-            <pc:docMk/>
-            <pc:sldMk cId="2133937481" sldId="265"/>
-            <ac:picMk id="6" creationId="{049C7BF1-AF15-4EFA-335A-6B90F44B39B9}"/>
-          </ac:picMkLst>
-        </pc:picChg>
-        <pc:picChg chg="add del mod">
-          <ac:chgData name="Άριστος Αρέστη" userId="813aa191-2d4c-464f-9d05-0a7e494d859f" providerId="ADAL" clId="{25D75829-2E2B-4803-9D7B-2244E29787E6}" dt="2026-09-13T07:29:17.580" v="146" actId="478"/>
-          <ac:picMkLst>
-            <pc:docMk/>
-            <pc:sldMk cId="2133937481" sldId="265"/>
-            <ac:picMk id="7" creationId="{A024039F-4FCA-2656-29E5-DDA68AB49912}"/>
-          </ac:picMkLst>
-        </pc:picChg>
-        <pc:picChg chg="add mod">
-          <ac:chgData name="Άριστος Αρέστη" userId="813aa191-2d4c-464f-9d05-0a7e494d859f" providerId="ADAL" clId="{25D75829-2E2B-4803-9D7B-2244E29787E6}" dt="2026-09-13T07:32:30.229" v="216" actId="1076"/>
-          <ac:picMkLst>
-            <pc:docMk/>
-            <pc:sldMk cId="2133937481" sldId="265"/>
-            <ac:picMk id="8" creationId="{DA1DA27B-5F72-79C9-2E6C-00CAC4BB749B}"/>
-          </ac:picMkLst>
-        </pc:picChg>
-      </pc:sldChg>
-      <pc:sldChg chg="del">
-        <pc:chgData name="Άριστος Αρέστη" userId="813aa191-2d4c-464f-9d05-0a7e494d859f" providerId="ADAL" clId="{25D75829-2E2B-4803-9D7B-2244E29787E6}" dt="2026-09-05T07:23:52.116" v="32" actId="47"/>
-        <pc:sldMkLst>
-          <pc:docMk/>
-          <pc:sldMk cId="1791099530" sldId="266"/>
-        </pc:sldMkLst>
-      </pc:sldChg>
-      <pc:sldChg chg="addSp delSp modSp add mod">
-        <pc:chgData name="Άριστος Αρέστη" userId="813aa191-2d4c-464f-9d05-0a7e494d859f" providerId="ADAL" clId="{25D75829-2E2B-4803-9D7B-2244E29787E6}" dt="2026-09-10T14:03:40.113" v="134" actId="108"/>
-        <pc:sldMkLst>
-          <pc:docMk/>
-          <pc:sldMk cId="2484230000" sldId="266"/>
-        </pc:sldMkLst>
-        <pc:spChg chg="mod">
-          <ac:chgData name="Άριστος Αρέστη" userId="813aa191-2d4c-464f-9d05-0a7e494d859f" providerId="ADAL" clId="{25D75829-2E2B-4803-9D7B-2244E29787E6}" dt="2026-09-10T14:03:40.113" v="134" actId="108"/>
-          <ac:spMkLst>
-            <pc:docMk/>
-            <pc:sldMk cId="2484230000" sldId="266"/>
-            <ac:spMk id="2" creationId="{657759B8-F883-AF39-A232-3F38E0FBC22C}"/>
-          </ac:spMkLst>
-        </pc:spChg>
-        <pc:picChg chg="del">
-          <ac:chgData name="Άριστος Αρέστη" userId="813aa191-2d4c-464f-9d05-0a7e494d859f" providerId="ADAL" clId="{25D75829-2E2B-4803-9D7B-2244E29787E6}" dt="2026-09-05T07:24:36.215" v="40" actId="478"/>
-          <ac:picMkLst>
-            <pc:docMk/>
-            <pc:sldMk cId="2484230000" sldId="266"/>
-            <ac:picMk id="4" creationId="{ACD7F2FB-70D6-4795-BEB4-29D51F8D76BC}"/>
-          </ac:picMkLst>
-        </pc:picChg>
-        <pc:picChg chg="add mod">
-          <ac:chgData name="Άριστος Αρέστη" userId="813aa191-2d4c-464f-9d05-0a7e494d859f" providerId="ADAL" clId="{25D75829-2E2B-4803-9D7B-2244E29787E6}" dt="2026-09-05T07:25:14.079" v="49" actId="14100"/>
-          <ac:picMkLst>
-            <pc:docMk/>
-            <pc:sldMk cId="2484230000" sldId="266"/>
-            <ac:picMk id="5" creationId="{F5473A42-2367-FB19-C65A-741944CC73DD}"/>
-          </ac:picMkLst>
-        </pc:picChg>
-        <pc:picChg chg="del">
-          <ac:chgData name="Άριστος Αρέστη" userId="813aa191-2d4c-464f-9d05-0a7e494d859f" providerId="ADAL" clId="{25D75829-2E2B-4803-9D7B-2244E29787E6}" dt="2026-09-05T07:24:37.856" v="41" actId="478"/>
-          <ac:picMkLst>
-            <pc:docMk/>
-            <pc:sldMk cId="2484230000" sldId="266"/>
-            <ac:picMk id="7" creationId="{A024039F-4FCA-2656-29E5-DDA68AB49912}"/>
-          </ac:picMkLst>
-        </pc:picChg>
-      </pc:sldChg>
-      <pc:sldChg chg="addSp delSp modSp add mod">
-        <pc:chgData name="Άριστος Αρέστη" userId="813aa191-2d4c-464f-9d05-0a7e494d859f" providerId="ADAL" clId="{25D75829-2E2B-4803-9D7B-2244E29787E6}" dt="2026-09-10T14:03:45.813" v="135" actId="108"/>
-        <pc:sldMkLst>
-          <pc:docMk/>
-          <pc:sldMk cId="1720723223" sldId="267"/>
-        </pc:sldMkLst>
-        <pc:spChg chg="mod">
-          <ac:chgData name="Άριστος Αρέστη" userId="813aa191-2d4c-464f-9d05-0a7e494d859f" providerId="ADAL" clId="{25D75829-2E2B-4803-9D7B-2244E29787E6}" dt="2026-09-10T14:03:45.813" v="135" actId="108"/>
-          <ac:spMkLst>
-            <pc:docMk/>
-            <pc:sldMk cId="1720723223" sldId="267"/>
-            <ac:spMk id="2" creationId="{657759B8-F883-AF39-A232-3F38E0FBC22C}"/>
-          </ac:spMkLst>
-        </pc:spChg>
-        <pc:spChg chg="add mod">
-          <ac:chgData name="Άριστος Αρέστη" userId="813aa191-2d4c-464f-9d05-0a7e494d859f" providerId="ADAL" clId="{25D75829-2E2B-4803-9D7B-2244E29787E6}" dt="2026-09-05T07:28:12.959" v="70" actId="20577"/>
-          <ac:spMkLst>
-            <pc:docMk/>
-            <pc:sldMk cId="1720723223" sldId="267"/>
-            <ac:spMk id="3" creationId="{5B8C35DC-53FD-41F8-34FA-B18274898A83}"/>
-          </ac:spMkLst>
-        </pc:spChg>
-        <pc:picChg chg="del">
-          <ac:chgData name="Άριστος Αρέστη" userId="813aa191-2d4c-464f-9d05-0a7e494d859f" providerId="ADAL" clId="{25D75829-2E2B-4803-9D7B-2244E29787E6}" dt="2026-09-05T07:27:44.831" v="53" actId="478"/>
-          <ac:picMkLst>
-            <pc:docMk/>
-            <pc:sldMk cId="1720723223" sldId="267"/>
-            <ac:picMk id="5" creationId="{F5473A42-2367-FB19-C65A-741944CC73DD}"/>
-          </ac:picMkLst>
-        </pc:picChg>
-        <pc:picChg chg="add mod">
-          <ac:chgData name="Άριστος Αρέστη" userId="813aa191-2d4c-464f-9d05-0a7e494d859f" providerId="ADAL" clId="{25D75829-2E2B-4803-9D7B-2244E29787E6}" dt="2026-09-05T07:30:06.949" v="78" actId="1076"/>
-          <ac:picMkLst>
-            <pc:docMk/>
-            <pc:sldMk cId="1720723223" sldId="267"/>
-            <ac:picMk id="6" creationId="{2E9D3171-64DA-8381-8D04-09A224A65E1D}"/>
-          </ac:picMkLst>
-        </pc:picChg>
-        <pc:picChg chg="add mod">
-          <ac:chgData name="Άριστος Αρέστη" userId="813aa191-2d4c-464f-9d05-0a7e494d859f" providerId="ADAL" clId="{25D75829-2E2B-4803-9D7B-2244E29787E6}" dt="2026-09-05T07:30:45.990" v="85" actId="14100"/>
-          <ac:picMkLst>
-            <pc:docMk/>
-            <pc:sldMk cId="1720723223" sldId="267"/>
-            <ac:picMk id="8" creationId="{1F21FEA4-0482-7E2C-C273-A8ABB575C518}"/>
-          </ac:picMkLst>
-        </pc:picChg>
-      </pc:sldChg>
-      <pc:sldChg chg="del">
-        <pc:chgData name="Άριστος Αρέστη" userId="813aa191-2d4c-464f-9d05-0a7e494d859f" providerId="ADAL" clId="{25D75829-2E2B-4803-9D7B-2244E29787E6}" dt="2026-09-05T07:23:54.599" v="33" actId="47"/>
-        <pc:sldMkLst>
-          <pc:docMk/>
-          <pc:sldMk cId="4205591542" sldId="267"/>
-        </pc:sldMkLst>
-      </pc:sldChg>
-      <pc:sldChg chg="delSp modSp add mod">
-        <pc:chgData name="Άριστος Αρέστη" userId="813aa191-2d4c-464f-9d05-0a7e494d859f" providerId="ADAL" clId="{25D75829-2E2B-4803-9D7B-2244E29787E6}" dt="2026-09-14T08:50:28.513" v="249" actId="113"/>
-        <pc:sldMkLst>
-          <pc:docMk/>
-          <pc:sldMk cId="2654053172" sldId="268"/>
-        </pc:sldMkLst>
-        <pc:spChg chg="mod">
-          <ac:chgData name="Άριστος Αρέστη" userId="813aa191-2d4c-464f-9d05-0a7e494d859f" providerId="ADAL" clId="{25D75829-2E2B-4803-9D7B-2244E29787E6}" dt="2026-09-10T14:03:57.586" v="136" actId="108"/>
-          <ac:spMkLst>
-            <pc:docMk/>
-            <pc:sldMk cId="2654053172" sldId="268"/>
-            <ac:spMk id="2" creationId="{657759B8-F883-AF39-A232-3F38E0FBC22C}"/>
-          </ac:spMkLst>
-        </pc:spChg>
-        <pc:spChg chg="mod">
-          <ac:chgData name="Άριστος Αρέστη" userId="813aa191-2d4c-464f-9d05-0a7e494d859f" providerId="ADAL" clId="{25D75829-2E2B-4803-9D7B-2244E29787E6}" dt="2026-09-14T08:50:28.513" v="249" actId="113"/>
-          <ac:spMkLst>
-            <pc:docMk/>
-            <pc:sldMk cId="2654053172" sldId="268"/>
-            <ac:spMk id="3" creationId="{5B8C35DC-53FD-41F8-34FA-B18274898A83}"/>
-          </ac:spMkLst>
-        </pc:spChg>
-        <pc:picChg chg="del">
-          <ac:chgData name="Άριστος Αρέστη" userId="813aa191-2d4c-464f-9d05-0a7e494d859f" providerId="ADAL" clId="{25D75829-2E2B-4803-9D7B-2244E29787E6}" dt="2026-09-05T07:32:53.484" v="90" actId="478"/>
-          <ac:picMkLst>
-            <pc:docMk/>
-            <pc:sldMk cId="2654053172" sldId="268"/>
-            <ac:picMk id="6" creationId="{2E9D3171-64DA-8381-8D04-09A224A65E1D}"/>
-          </ac:picMkLst>
-        </pc:picChg>
-        <pc:picChg chg="del">
-          <ac:chgData name="Άριστος Αρέστη" userId="813aa191-2d4c-464f-9d05-0a7e494d859f" providerId="ADAL" clId="{25D75829-2E2B-4803-9D7B-2244E29787E6}" dt="2026-09-05T07:32:51.775" v="89" actId="478"/>
-          <ac:picMkLst>
-            <pc:docMk/>
-            <pc:sldMk cId="2654053172" sldId="268"/>
-            <ac:picMk id="8" creationId="{1F21FEA4-0482-7E2C-C273-A8ABB575C518}"/>
-          </ac:picMkLst>
-        </pc:picChg>
-      </pc:sldChg>
-      <pc:sldChg chg="add">
-        <pc:chgData name="Άριστος Αρέστη" userId="813aa191-2d4c-464f-9d05-0a7e494d859f" providerId="ADAL" clId="{25D75829-2E2B-4803-9D7B-2244E29787E6}" dt="2026-09-13T07:43:19.298" v="220"/>
-        <pc:sldMkLst>
-          <pc:docMk/>
-          <pc:sldMk cId="2803347715" sldId="269"/>
-        </pc:sldMkLst>
-      </pc:sldChg>
-    </pc:docChg>
-  </pc:docChgLst>
-  <pc:docChgLst>
-    <pc:chgData name="Άριστος Αρέστη" userId="813aa191-2d4c-464f-9d05-0a7e494d859f" providerId="ADAL" clId="{BB7862B2-3969-4282-9561-261C6068E8E4}"/>
-    <pc:docChg chg="custSel addSld delSld modSld">
-      <pc:chgData name="Άριστος Αρέστη" userId="813aa191-2d4c-464f-9d05-0a7e494d859f" providerId="ADAL" clId="{BB7862B2-3969-4282-9561-261C6068E8E4}" dt="2026-09-05T07:02:13.829" v="201" actId="14100"/>
-      <pc:docMkLst>
-        <pc:docMk/>
-      </pc:docMkLst>
-      <pc:sldChg chg="modSp">
-        <pc:chgData name="Άριστος Αρέστη" userId="813aa191-2d4c-464f-9d05-0a7e494d859f" providerId="ADAL" clId="{BB7862B2-3969-4282-9561-261C6068E8E4}" dt="2026-09-05T06:22:20.991" v="35" actId="20577"/>
-        <pc:sldMkLst>
-          <pc:docMk/>
-          <pc:sldMk cId="3019854637" sldId="256"/>
-        </pc:sldMkLst>
-        <pc:spChg chg="mod">
-          <ac:chgData name="Άριστος Αρέστη" userId="813aa191-2d4c-464f-9d05-0a7e494d859f" providerId="ADAL" clId="{BB7862B2-3969-4282-9561-261C6068E8E4}" dt="2026-09-05T06:22:20.991" v="35" actId="20577"/>
-          <ac:spMkLst>
-            <pc:docMk/>
-            <pc:sldMk cId="3019854637" sldId="256"/>
-            <ac:spMk id="2" creationId="{36571B63-82A4-FC3D-9860-20F38F123861}"/>
-          </ac:spMkLst>
-        </pc:spChg>
-      </pc:sldChg>
-      <pc:sldChg chg="addSp delSp modSp mod">
-        <pc:chgData name="Άριστος Αρέστη" userId="813aa191-2d4c-464f-9d05-0a7e494d859f" providerId="ADAL" clId="{BB7862B2-3969-4282-9561-261C6068E8E4}" dt="2026-09-05T06:29:32.012" v="54" actId="14100"/>
-        <pc:sldMkLst>
-          <pc:docMk/>
-          <pc:sldMk cId="4279378956" sldId="257"/>
-        </pc:sldMkLst>
-        <pc:spChg chg="mod">
-          <ac:chgData name="Άριστος Αρέστη" userId="813aa191-2d4c-464f-9d05-0a7e494d859f" providerId="ADAL" clId="{BB7862B2-3969-4282-9561-261C6068E8E4}" dt="2026-09-05T06:22:46.825" v="36"/>
-          <ac:spMkLst>
-            <pc:docMk/>
-            <pc:sldMk cId="4279378956" sldId="257"/>
-            <ac:spMk id="2" creationId="{657759B8-F883-AF39-A232-3F38E0FBC22C}"/>
-          </ac:spMkLst>
-        </pc:spChg>
-        <pc:spChg chg="mod">
-          <ac:chgData name="Άριστος Αρέστη" userId="813aa191-2d4c-464f-9d05-0a7e494d859f" providerId="ADAL" clId="{BB7862B2-3969-4282-9561-261C6068E8E4}" dt="2026-09-05T06:27:46.052" v="46" actId="6549"/>
-          <ac:spMkLst>
-            <pc:docMk/>
-            <pc:sldMk cId="4279378956" sldId="257"/>
-            <ac:spMk id="3" creationId="{602ECB2F-F3B9-B659-B9D7-CEF79378CD6B}"/>
-          </ac:spMkLst>
-        </pc:spChg>
-        <pc:picChg chg="del">
-          <ac:chgData name="Άριστος Αρέστη" userId="813aa191-2d4c-464f-9d05-0a7e494d859f" providerId="ADAL" clId="{BB7862B2-3969-4282-9561-261C6068E8E4}" dt="2026-09-05T06:27:49.065" v="47" actId="478"/>
-          <ac:picMkLst>
-            <pc:docMk/>
-            <pc:sldMk cId="4279378956" sldId="257"/>
-            <ac:picMk id="5" creationId="{447DEFFD-9218-392E-D0E2-4CC1939D9AAB}"/>
-          </ac:picMkLst>
-        </pc:picChg>
-        <pc:picChg chg="add mod">
-          <ac:chgData name="Άριστος Αρέστη" userId="813aa191-2d4c-464f-9d05-0a7e494d859f" providerId="ADAL" clId="{BB7862B2-3969-4282-9561-261C6068E8E4}" dt="2026-09-05T06:29:32.012" v="54" actId="14100"/>
-          <ac:picMkLst>
-            <pc:docMk/>
-            <pc:sldMk cId="4279378956" sldId="257"/>
-            <ac:picMk id="6" creationId="{049C7BF1-AF15-4EFA-335A-6B90F44B39B9}"/>
-          </ac:picMkLst>
-        </pc:picChg>
-      </pc:sldChg>
-      <pc:sldChg chg="del">
-        <pc:chgData name="Άριστος Αρέστη" userId="813aa191-2d4c-464f-9d05-0a7e494d859f" providerId="ADAL" clId="{BB7862B2-3969-4282-9561-261C6068E8E4}" dt="2026-09-05T06:48:33.060" v="95" actId="47"/>
-        <pc:sldMkLst>
-          <pc:docMk/>
-          <pc:sldMk cId="205878500" sldId="258"/>
-        </pc:sldMkLst>
-      </pc:sldChg>
-      <pc:sldChg chg="del">
-        <pc:chgData name="Άριστος Αρέστη" userId="813aa191-2d4c-464f-9d05-0a7e494d859f" providerId="ADAL" clId="{BB7862B2-3969-4282-9561-261C6068E8E4}" dt="2026-09-05T06:48:33.060" v="95" actId="47"/>
-        <pc:sldMkLst>
-          <pc:docMk/>
-          <pc:sldMk cId="2052397070" sldId="259"/>
-        </pc:sldMkLst>
-      </pc:sldChg>
-      <pc:sldChg chg="del">
-        <pc:chgData name="Άριστος Αρέστη" userId="813aa191-2d4c-464f-9d05-0a7e494d859f" providerId="ADAL" clId="{BB7862B2-3969-4282-9561-261C6068E8E4}" dt="2026-09-05T06:48:33.060" v="95" actId="47"/>
-        <pc:sldMkLst>
-          <pc:docMk/>
-          <pc:sldMk cId="2311054826" sldId="261"/>
-        </pc:sldMkLst>
-      </pc:sldChg>
-      <pc:sldChg chg="del">
-        <pc:chgData name="Άριστος Αρέστη" userId="813aa191-2d4c-464f-9d05-0a7e494d859f" providerId="ADAL" clId="{BB7862B2-3969-4282-9561-261C6068E8E4}" dt="2026-09-05T06:48:33.060" v="95" actId="47"/>
-        <pc:sldMkLst>
-          <pc:docMk/>
-          <pc:sldMk cId="1425835038" sldId="262"/>
-        </pc:sldMkLst>
-      </pc:sldChg>
-      <pc:sldChg chg="addSp delSp modSp add mod setBg delDesignElem">
-        <pc:chgData name="Άριστος Αρέστη" userId="813aa191-2d4c-464f-9d05-0a7e494d859f" providerId="ADAL" clId="{BB7862B2-3969-4282-9561-261C6068E8E4}" dt="2026-09-05T06:37:41.443" v="94" actId="14100"/>
-        <pc:sldMkLst>
-          <pc:docMk/>
-          <pc:sldMk cId="2026847565" sldId="264"/>
-        </pc:sldMkLst>
-        <pc:spChg chg="mod">
-          <ac:chgData name="Άριστος Αρέστη" userId="813aa191-2d4c-464f-9d05-0a7e494d859f" providerId="ADAL" clId="{BB7862B2-3969-4282-9561-261C6068E8E4}" dt="2026-09-05T06:37:41.443" v="94" actId="14100"/>
-          <ac:spMkLst>
-            <pc:docMk/>
-            <pc:sldMk cId="2026847565" sldId="264"/>
-            <ac:spMk id="2" creationId="{657759B8-F883-AF39-A232-3F38E0FBC22C}"/>
-          </ac:spMkLst>
-        </pc:spChg>
-        <pc:spChg chg="del">
-          <ac:chgData name="Άριστος Αρέστη" userId="813aa191-2d4c-464f-9d05-0a7e494d859f" providerId="ADAL" clId="{BB7862B2-3969-4282-9561-261C6068E8E4}" dt="2026-09-05T06:31:56.271" v="73" actId="478"/>
-          <ac:spMkLst>
-            <pc:docMk/>
-            <pc:sldMk cId="2026847565" sldId="264"/>
-            <ac:spMk id="3" creationId="{602ECB2F-F3B9-B659-B9D7-CEF79378CD6B}"/>
-          </ac:spMkLst>
-        </pc:spChg>
-        <pc:spChg chg="add del mod">
-          <ac:chgData name="Άριστος Αρέστη" userId="813aa191-2d4c-464f-9d05-0a7e494d859f" providerId="ADAL" clId="{BB7862B2-3969-4282-9561-261C6068E8E4}" dt="2026-09-05T06:31:58.885" v="74" actId="478"/>
-          <ac:spMkLst>
-            <pc:docMk/>
-            <pc:sldMk cId="2026847565" sldId="264"/>
-            <ac:spMk id="5" creationId="{82F71D2E-D222-AF84-6D2E-3CEE2BFDC7BF}"/>
-          </ac:spMkLst>
-        </pc:spChg>
-        <pc:spChg chg="del">
-          <ac:chgData name="Άριστος Αρέστη" userId="813aa191-2d4c-464f-9d05-0a7e494d859f" providerId="ADAL" clId="{BB7862B2-3969-4282-9561-261C6068E8E4}" dt="2026-09-05T06:31:27.725" v="56"/>
-          <ac:spMkLst>
-            <pc:docMk/>
-            <pc:sldMk cId="2026847565" sldId="264"/>
-            <ac:spMk id="10" creationId="{DBC6133C-0615-4CE4-9132-37E609A9BDFA}"/>
-          </ac:spMkLst>
-        </pc:spChg>
-        <pc:spChg chg="del">
-          <ac:chgData name="Άριστος Αρέστη" userId="813aa191-2d4c-464f-9d05-0a7e494d859f" providerId="ADAL" clId="{BB7862B2-3969-4282-9561-261C6068E8E4}" dt="2026-09-05T06:31:27.725" v="56"/>
-          <ac:spMkLst>
-            <pc:docMk/>
-            <pc:sldMk cId="2026847565" sldId="264"/>
-            <ac:spMk id="12" creationId="{169CC832-2974-4E8D-90ED-3E2941BA7336}"/>
-          </ac:spMkLst>
-        </pc:spChg>
-        <pc:spChg chg="del">
-          <ac:chgData name="Άριστος Αρέστη" userId="813aa191-2d4c-464f-9d05-0a7e494d859f" providerId="ADAL" clId="{BB7862B2-3969-4282-9561-261C6068E8E4}" dt="2026-09-05T06:31:27.725" v="56"/>
-          <ac:spMkLst>
-            <pc:docMk/>
-            <pc:sldMk cId="2026847565" sldId="264"/>
-            <ac:spMk id="14" creationId="{55222F96-971A-4F90-B841-6BAB416C7AC1}"/>
-          </ac:spMkLst>
-        </pc:spChg>
-        <pc:spChg chg="del">
-          <ac:chgData name="Άριστος Αρέστη" userId="813aa191-2d4c-464f-9d05-0a7e494d859f" providerId="ADAL" clId="{BB7862B2-3969-4282-9561-261C6068E8E4}" dt="2026-09-05T06:31:27.725" v="56"/>
-          <ac:spMkLst>
-            <pc:docMk/>
-            <pc:sldMk cId="2026847565" sldId="264"/>
-            <ac:spMk id="16" creationId="{08980754-6F4B-43C9-B9BE-127B6BED6586}"/>
-          </ac:spMkLst>
-        </pc:spChg>
-        <pc:spChg chg="del">
-          <ac:chgData name="Άριστος Αρέστη" userId="813aa191-2d4c-464f-9d05-0a7e494d859f" providerId="ADAL" clId="{BB7862B2-3969-4282-9561-261C6068E8E4}" dt="2026-09-05T06:31:27.725" v="56"/>
-          <ac:spMkLst>
-            <pc:docMk/>
-            <pc:sldMk cId="2026847565" sldId="264"/>
-            <ac:spMk id="18" creationId="{2C1BBA94-3F40-40AA-8BB9-E69E25E537C1}"/>
-          </ac:spMkLst>
-        </pc:spChg>
-        <pc:picChg chg="del mod">
-          <ac:chgData name="Άριστος Αρέστη" userId="813aa191-2d4c-464f-9d05-0a7e494d859f" providerId="ADAL" clId="{BB7862B2-3969-4282-9561-261C6068E8E4}" dt="2026-09-05T06:36:21.652" v="84" actId="478"/>
-          <ac:picMkLst>
-            <pc:docMk/>
-            <pc:sldMk cId="2026847565" sldId="264"/>
-            <ac:picMk id="6" creationId="{049C7BF1-AF15-4EFA-335A-6B90F44B39B9}"/>
-          </ac:picMkLst>
-        </pc:picChg>
-        <pc:picChg chg="add mod">
-          <ac:chgData name="Άριστος Αρέστη" userId="813aa191-2d4c-464f-9d05-0a7e494d859f" providerId="ADAL" clId="{BB7862B2-3969-4282-9561-261C6068E8E4}" dt="2026-09-05T06:37:00.604" v="90" actId="14100"/>
-          <ac:picMkLst>
-            <pc:docMk/>
-            <pc:sldMk cId="2026847565" sldId="264"/>
-            <ac:picMk id="8" creationId="{CD170797-3798-34CF-9D41-28BD780D5884}"/>
-          </ac:picMkLst>
-        </pc:picChg>
-      </pc:sldChg>
-      <pc:sldChg chg="add">
-        <pc:chgData name="Άριστος Αρέστη" userId="813aa191-2d4c-464f-9d05-0a7e494d859f" providerId="ADAL" clId="{BB7862B2-3969-4282-9561-261C6068E8E4}" dt="2026-09-05T06:35:46.966" v="81"/>
-        <pc:sldMkLst>
-          <pc:docMk/>
-          <pc:sldMk cId="2133937481" sldId="265"/>
-        </pc:sldMkLst>
-      </pc:sldChg>
-      <pc:sldChg chg="delSp add del setBg delDesignElem">
-        <pc:chgData name="Άριστος Αρέστη" userId="813aa191-2d4c-464f-9d05-0a7e494d859f" providerId="ADAL" clId="{BB7862B2-3969-4282-9561-261C6068E8E4}" dt="2026-09-05T06:35:43.383" v="80" actId="47"/>
-        <pc:sldMkLst>
-          <pc:docMk/>
-          <pc:sldMk cId="3748839693" sldId="265"/>
-        </pc:sldMkLst>
-        <pc:spChg chg="del">
-          <ac:chgData name="Άριστος Αρέστη" userId="813aa191-2d4c-464f-9d05-0a7e494d859f" providerId="ADAL" clId="{BB7862B2-3969-4282-9561-261C6068E8E4}" dt="2026-09-05T06:35:36.647" v="79"/>
-          <ac:spMkLst>
-            <pc:docMk/>
-            <pc:sldMk cId="3748839693" sldId="265"/>
-            <ac:spMk id="10" creationId="{DBC6133C-0615-4CE4-9132-37E609A9BDFA}"/>
-          </ac:spMkLst>
-        </pc:spChg>
-        <pc:spChg chg="del">
-          <ac:chgData name="Άριστος Αρέστη" userId="813aa191-2d4c-464f-9d05-0a7e494d859f" providerId="ADAL" clId="{BB7862B2-3969-4282-9561-261C6068E8E4}" dt="2026-09-05T06:35:36.647" v="79"/>
-          <ac:spMkLst>
-            <pc:docMk/>
-            <pc:sldMk cId="3748839693" sldId="265"/>
-            <ac:spMk id="12" creationId="{169CC832-2974-4E8D-90ED-3E2941BA7336}"/>
-          </ac:spMkLst>
-        </pc:spChg>
-        <pc:spChg chg="del">
-          <ac:chgData name="Άριστος Αρέστη" userId="813aa191-2d4c-464f-9d05-0a7e494d859f" providerId="ADAL" clId="{BB7862B2-3969-4282-9561-261C6068E8E4}" dt="2026-09-05T06:35:36.647" v="79"/>
-          <ac:spMkLst>
-            <pc:docMk/>
-            <pc:sldMk cId="3748839693" sldId="265"/>
-            <ac:spMk id="14" creationId="{55222F96-971A-4F90-B841-6BAB416C7AC1}"/>
-          </ac:spMkLst>
-        </pc:spChg>
-        <pc:spChg chg="del">
-          <ac:chgData name="Άριστος Αρέστη" userId="813aa191-2d4c-464f-9d05-0a7e494d859f" providerId="ADAL" clId="{BB7862B2-3969-4282-9561-261C6068E8E4}" dt="2026-09-05T06:35:36.647" v="79"/>
-          <ac:spMkLst>
-            <pc:docMk/>
-            <pc:sldMk cId="3748839693" sldId="265"/>
-            <ac:spMk id="16" creationId="{08980754-6F4B-43C9-B9BE-127B6BED6586}"/>
-          </ac:spMkLst>
-        </pc:spChg>
-        <pc:spChg chg="del">
-          <ac:chgData name="Άριστος Αρέστη" userId="813aa191-2d4c-464f-9d05-0a7e494d859f" providerId="ADAL" clId="{BB7862B2-3969-4282-9561-261C6068E8E4}" dt="2026-09-05T06:35:36.647" v="79"/>
-          <ac:spMkLst>
-            <pc:docMk/>
-            <pc:sldMk cId="3748839693" sldId="265"/>
-            <ac:spMk id="18" creationId="{2C1BBA94-3F40-40AA-8BB9-E69E25E537C1}"/>
-          </ac:spMkLst>
-        </pc:spChg>
-      </pc:sldChg>
-      <pc:sldChg chg="addSp delSp modSp add mod">
-        <pc:chgData name="Άριστος Αρέστη" userId="813aa191-2d4c-464f-9d05-0a7e494d859f" providerId="ADAL" clId="{BB7862B2-3969-4282-9561-261C6068E8E4}" dt="2026-09-05T06:53:17.663" v="180" actId="14100"/>
-        <pc:sldMkLst>
-          <pc:docMk/>
-          <pc:sldMk cId="1791099530" sldId="266"/>
-        </pc:sldMkLst>
-        <pc:spChg chg="mod">
-          <ac:chgData name="Άριστος Αρέστη" userId="813aa191-2d4c-464f-9d05-0a7e494d859f" providerId="ADAL" clId="{BB7862B2-3969-4282-9561-261C6068E8E4}" dt="2026-09-05T06:51:18.518" v="164" actId="113"/>
-          <ac:spMkLst>
-            <pc:docMk/>
-            <pc:sldMk cId="1791099530" sldId="266"/>
-            <ac:spMk id="2" creationId="{657759B8-F883-AF39-A232-3F38E0FBC22C}"/>
-          </ac:spMkLst>
-        </pc:spChg>
-        <pc:spChg chg="add mod">
-          <ac:chgData name="Άριστος Αρέστη" userId="813aa191-2d4c-464f-9d05-0a7e494d859f" providerId="ADAL" clId="{BB7862B2-3969-4282-9561-261C6068E8E4}" dt="2026-09-05T06:52:44.031" v="173"/>
-          <ac:spMkLst>
-            <pc:docMk/>
-            <pc:sldMk cId="1791099530" sldId="266"/>
-            <ac:spMk id="3" creationId="{74387376-3D52-5550-C44C-F9986830EDD3}"/>
-          </ac:spMkLst>
-        </pc:spChg>
-        <pc:picChg chg="add mod">
-          <ac:chgData name="Άριστος Αρέστη" userId="813aa191-2d4c-464f-9d05-0a7e494d859f" providerId="ADAL" clId="{BB7862B2-3969-4282-9561-261C6068E8E4}" dt="2026-09-05T06:53:17.663" v="180" actId="14100"/>
-          <ac:picMkLst>
-            <pc:docMk/>
-            <pc:sldMk cId="1791099530" sldId="266"/>
-            <ac:picMk id="5" creationId="{58C36D7C-6B57-A0EF-2995-32D0AD11AB13}"/>
-          </ac:picMkLst>
-        </pc:picChg>
-        <pc:picChg chg="del">
-          <ac:chgData name="Άριστος Αρέστη" userId="813aa191-2d4c-464f-9d05-0a7e494d859f" providerId="ADAL" clId="{BB7862B2-3969-4282-9561-261C6068E8E4}" dt="2026-09-05T06:51:21.335" v="165" actId="478"/>
-          <ac:picMkLst>
-            <pc:docMk/>
-            <pc:sldMk cId="1791099530" sldId="266"/>
-            <ac:picMk id="6" creationId="{049C7BF1-AF15-4EFA-335A-6B90F44B39B9}"/>
-          </ac:picMkLst>
-        </pc:picChg>
-      </pc:sldChg>
-      <pc:sldChg chg="addSp delSp modSp add mod">
-        <pc:chgData name="Άριστος Αρέστη" userId="813aa191-2d4c-464f-9d05-0a7e494d859f" providerId="ADAL" clId="{BB7862B2-3969-4282-9561-261C6068E8E4}" dt="2026-09-05T07:02:13.829" v="201" actId="14100"/>
-        <pc:sldMkLst>
-          <pc:docMk/>
-          <pc:sldMk cId="4205591542" sldId="267"/>
-        </pc:sldMkLst>
-        <pc:spChg chg="mod">
-          <ac:chgData name="Άριστος Αρέστη" userId="813aa191-2d4c-464f-9d05-0a7e494d859f" providerId="ADAL" clId="{BB7862B2-3969-4282-9561-261C6068E8E4}" dt="2026-09-05T07:00:16.344" v="185" actId="14100"/>
-          <ac:spMkLst>
-            <pc:docMk/>
-            <pc:sldMk cId="4205591542" sldId="267"/>
-            <ac:spMk id="2" creationId="{657759B8-F883-AF39-A232-3F38E0FBC22C}"/>
-          </ac:spMkLst>
-        </pc:spChg>
-        <pc:spChg chg="mod">
-          <ac:chgData name="Άριστος Αρέστη" userId="813aa191-2d4c-464f-9d05-0a7e494d859f" providerId="ADAL" clId="{BB7862B2-3969-4282-9561-261C6068E8E4}" dt="2026-09-05T07:00:54.733" v="195" actId="6549"/>
-          <ac:spMkLst>
-            <pc:docMk/>
-            <pc:sldMk cId="4205591542" sldId="267"/>
-            <ac:spMk id="3" creationId="{74387376-3D52-5550-C44C-F9986830EDD3}"/>
-          </ac:spMkLst>
-        </pc:spChg>
-        <pc:picChg chg="del">
-          <ac:chgData name="Άριστος Αρέστη" userId="813aa191-2d4c-464f-9d05-0a7e494d859f" providerId="ADAL" clId="{BB7862B2-3969-4282-9561-261C6068E8E4}" dt="2026-09-05T07:02:01.301" v="196" actId="478"/>
-          <ac:picMkLst>
-            <pc:docMk/>
-            <pc:sldMk cId="4205591542" sldId="267"/>
-            <ac:picMk id="5" creationId="{58C36D7C-6B57-A0EF-2995-32D0AD11AB13}"/>
-          </ac:picMkLst>
-        </pc:picChg>
-        <pc:picChg chg="add mod">
-          <ac:chgData name="Άριστος Αρέστη" userId="813aa191-2d4c-464f-9d05-0a7e494d859f" providerId="ADAL" clId="{BB7862B2-3969-4282-9561-261C6068E8E4}" dt="2026-09-05T07:02:13.829" v="201" actId="14100"/>
-          <ac:picMkLst>
-            <pc:docMk/>
-            <pc:sldMk cId="4205591542" sldId="267"/>
-            <ac:picMk id="6" creationId="{D2DD2D54-9C63-CEF9-6090-94174DFD6B25}"/>
-          </ac:picMkLst>
-        </pc:picChg>
       </pc:sldChg>
     </pc:docChg>
   </pc:docChgLst>
@@ -933,7 +289,7 @@
           <a:p>
             <a:fld id="{EDB99004-FBBF-4BCC-9BC3-88F554ADE514}" type="datetimeFigureOut">
               <a:rPr lang="en-CY" smtClean="0"/>
-              <a:t>09/14/2026</a:t>
+              <a:t>10/22/2026</a:t>
             </a:fld>
             <a:endParaRPr lang="en-CY"/>
           </a:p>
@@ -1133,7 +489,7 @@
           <a:p>
             <a:fld id="{EDB99004-FBBF-4BCC-9BC3-88F554ADE514}" type="datetimeFigureOut">
               <a:rPr lang="en-CY" smtClean="0"/>
-              <a:t>09/14/2026</a:t>
+              <a:t>10/22/2026</a:t>
             </a:fld>
             <a:endParaRPr lang="en-CY"/>
           </a:p>
@@ -1343,7 +699,7 @@
           <a:p>
             <a:fld id="{EDB99004-FBBF-4BCC-9BC3-88F554ADE514}" type="datetimeFigureOut">
               <a:rPr lang="en-CY" smtClean="0"/>
-              <a:t>09/14/2026</a:t>
+              <a:t>10/22/2026</a:t>
             </a:fld>
             <a:endParaRPr lang="en-CY"/>
           </a:p>
@@ -1543,7 +899,7 @@
           <a:p>
             <a:fld id="{EDB99004-FBBF-4BCC-9BC3-88F554ADE514}" type="datetimeFigureOut">
               <a:rPr lang="en-CY" smtClean="0"/>
-              <a:t>09/14/2026</a:t>
+              <a:t>10/22/2026</a:t>
             </a:fld>
             <a:endParaRPr lang="en-CY"/>
           </a:p>
@@ -1819,7 +1175,7 @@
           <a:p>
             <a:fld id="{EDB99004-FBBF-4BCC-9BC3-88F554ADE514}" type="datetimeFigureOut">
               <a:rPr lang="en-CY" smtClean="0"/>
-              <a:t>09/14/2026</a:t>
+              <a:t>10/22/2026</a:t>
             </a:fld>
             <a:endParaRPr lang="en-CY"/>
           </a:p>
@@ -2087,7 +1443,7 @@
           <a:p>
             <a:fld id="{EDB99004-FBBF-4BCC-9BC3-88F554ADE514}" type="datetimeFigureOut">
               <a:rPr lang="en-CY" smtClean="0"/>
-              <a:t>09/14/2026</a:t>
+              <a:t>10/22/2026</a:t>
             </a:fld>
             <a:endParaRPr lang="en-CY"/>
           </a:p>
@@ -2502,7 +1858,7 @@
           <a:p>
             <a:fld id="{EDB99004-FBBF-4BCC-9BC3-88F554ADE514}" type="datetimeFigureOut">
               <a:rPr lang="en-CY" smtClean="0"/>
-              <a:t>09/14/2026</a:t>
+              <a:t>10/22/2026</a:t>
             </a:fld>
             <a:endParaRPr lang="en-CY"/>
           </a:p>
@@ -2644,7 +2000,7 @@
           <a:p>
             <a:fld id="{EDB99004-FBBF-4BCC-9BC3-88F554ADE514}" type="datetimeFigureOut">
               <a:rPr lang="en-CY" smtClean="0"/>
-              <a:t>09/14/2026</a:t>
+              <a:t>10/22/2026</a:t>
             </a:fld>
             <a:endParaRPr lang="en-CY"/>
           </a:p>
@@ -2757,7 +2113,7 @@
           <a:p>
             <a:fld id="{EDB99004-FBBF-4BCC-9BC3-88F554ADE514}" type="datetimeFigureOut">
               <a:rPr lang="en-CY" smtClean="0"/>
-              <a:t>09/14/2026</a:t>
+              <a:t>10/22/2026</a:t>
             </a:fld>
             <a:endParaRPr lang="en-CY"/>
           </a:p>
@@ -3070,7 +2426,7 @@
           <a:p>
             <a:fld id="{EDB99004-FBBF-4BCC-9BC3-88F554ADE514}" type="datetimeFigureOut">
               <a:rPr lang="en-CY" smtClean="0"/>
-              <a:t>09/14/2026</a:t>
+              <a:t>10/22/2026</a:t>
             </a:fld>
             <a:endParaRPr lang="en-CY"/>
           </a:p>
@@ -3359,7 +2715,7 @@
           <a:p>
             <a:fld id="{EDB99004-FBBF-4BCC-9BC3-88F554ADE514}" type="datetimeFigureOut">
               <a:rPr lang="en-CY" smtClean="0"/>
-              <a:t>09/14/2026</a:t>
+              <a:t>10/22/2026</a:t>
             </a:fld>
             <a:endParaRPr lang="en-CY"/>
           </a:p>
@@ -3602,7 +2958,7 @@
           <a:p>
             <a:fld id="{EDB99004-FBBF-4BCC-9BC3-88F554ADE514}" type="datetimeFigureOut">
               <a:rPr lang="en-CY" smtClean="0"/>
-              <a:t>09/14/2026</a:t>
+              <a:t>10/22/2026</a:t>
             </a:fld>
             <a:endParaRPr lang="en-CY"/>
           </a:p>
@@ -6339,149 +5695,6 @@
   </p:cSld>
   <p:clrMapOvr>
     <a:overrideClrMapping bg1="lt1" tx1="dk1" bg2="lt2" tx2="dk2" accent1="accent1" accent2="accent2" accent3="accent3" accent4="accent4" accent5="accent5" accent6="accent6" hlink="hlink" folHlink="folHlink"/>
-  </p:clrMapOvr>
-</p:sld>
-</file>
-
-<file path=ppt/slides/slide9.xml><?xml version="1.0" encoding="utf-8"?>
-<p:sld xmlns:a="http://schemas.openxmlformats.org/drawingml/2006/main" xmlns:r="http://schemas.openxmlformats.org/officeDocument/2006/relationships" xmlns:p="http://schemas.openxmlformats.org/presentationml/2006/main">
-  <p:cSld>
-    <p:spTree>
-      <p:nvGrpSpPr>
-        <p:cNvPr id="1" name=""/>
-        <p:cNvGrpSpPr/>
-        <p:nvPr/>
-      </p:nvGrpSpPr>
-      <p:grpSpPr>
-        <a:xfrm>
-          <a:off x="0" y="0"/>
-          <a:ext cx="0" cy="0"/>
-          <a:chOff x="0" y="0"/>
-          <a:chExt cx="0" cy="0"/>
-        </a:xfrm>
-      </p:grpSpPr>
-      <p:sp>
-        <p:nvSpPr>
-          <p:cNvPr id="2" name="Title 1">
-            <a:extLst>
-              <a:ext uri="{FF2B5EF4-FFF2-40B4-BE49-F238E27FC236}">
-                <a16:creationId xmlns:a16="http://schemas.microsoft.com/office/drawing/2014/main" id="{4C4AE698-8678-D891-4A6F-29AB7E3B2063}"/>
-              </a:ext>
-            </a:extLst>
-          </p:cNvPr>
-          <p:cNvSpPr>
-            <a:spLocks noGrp="1"/>
-          </p:cNvSpPr>
-          <p:nvPr>
-            <p:ph type="title"/>
-          </p:nvPr>
-        </p:nvSpPr>
-        <p:spPr>
-          <a:xfrm>
-            <a:off x="630936" y="502920"/>
-            <a:ext cx="3419856" cy="1463040"/>
-          </a:xfrm>
-        </p:spPr>
-        <p:txBody>
-          <a:bodyPr anchor="ctr">
-            <a:normAutofit/>
-          </a:bodyPr>
-          <a:lstStyle/>
-          <a:p>
-            <a:r>
-              <a:rPr lang="el-GR" sz="3600" b="1" dirty="0">
-                <a:solidFill>
-                  <a:schemeClr val="accent2">
-                    <a:lumMod val="50000"/>
-                  </a:schemeClr>
-                </a:solidFill>
-              </a:rPr>
-              <a:t>Άσκηση για το σπίτι</a:t>
-            </a:r>
-            <a:endParaRPr lang="en-CY" sz="3600" b="1" dirty="0">
-              <a:solidFill>
-                <a:schemeClr val="accent2">
-                  <a:lumMod val="50000"/>
-                </a:schemeClr>
-              </a:solidFill>
-            </a:endParaRPr>
-          </a:p>
-        </p:txBody>
-      </p:sp>
-      <p:sp>
-        <p:nvSpPr>
-          <p:cNvPr id="3" name="Content Placeholder 2">
-            <a:extLst>
-              <a:ext uri="{FF2B5EF4-FFF2-40B4-BE49-F238E27FC236}">
-                <a16:creationId xmlns:a16="http://schemas.microsoft.com/office/drawing/2014/main" id="{CB04EA9D-51CA-E692-F388-D50BE1527C6F}"/>
-              </a:ext>
-            </a:extLst>
-          </p:cNvPr>
-          <p:cNvSpPr>
-            <a:spLocks noGrp="1"/>
-          </p:cNvSpPr>
-          <p:nvPr>
-            <p:ph idx="1"/>
-          </p:nvPr>
-        </p:nvSpPr>
-        <p:spPr>
-          <a:xfrm>
-            <a:off x="4654295" y="502920"/>
-            <a:ext cx="6894576" cy="1463040"/>
-          </a:xfrm>
-        </p:spPr>
-        <p:txBody>
-          <a:bodyPr anchor="ctr">
-            <a:normAutofit/>
-          </a:bodyPr>
-          <a:lstStyle/>
-          <a:p>
-            <a:pPr marL="0" indent="0">
-              <a:buNone/>
-            </a:pPr>
-            <a:endParaRPr lang="en-CY" sz="2200" dirty="0"/>
-          </a:p>
-        </p:txBody>
-      </p:sp>
-      <p:pic>
-        <p:nvPicPr>
-          <p:cNvPr id="4" name="Picture 3">
-            <a:extLst>
-              <a:ext uri="{FF2B5EF4-FFF2-40B4-BE49-F238E27FC236}">
-                <a16:creationId xmlns:a16="http://schemas.microsoft.com/office/drawing/2014/main" id="{9E7296DB-D8CC-505C-B0F7-96AFDA85275D}"/>
-              </a:ext>
-            </a:extLst>
-          </p:cNvPr>
-          <p:cNvPicPr>
-            <a:picLocks noChangeAspect="1"/>
-          </p:cNvPicPr>
-          <p:nvPr/>
-        </p:nvPicPr>
-        <p:blipFill>
-          <a:blip r:embed="rId2"/>
-          <a:stretch>
-            <a:fillRect/>
-          </a:stretch>
-        </p:blipFill>
-        <p:spPr>
-          <a:xfrm>
-            <a:off x="1078066" y="2290936"/>
-            <a:ext cx="10023676" cy="3959352"/>
-          </a:xfrm>
-          <a:prstGeom prst="rect">
-            <a:avLst/>
-          </a:prstGeom>
-        </p:spPr>
-      </p:pic>
-    </p:spTree>
-    <p:extLst>
-      <p:ext uri="{BB962C8B-B14F-4D97-AF65-F5344CB8AC3E}">
-        <p14:creationId xmlns:p14="http://schemas.microsoft.com/office/powerpoint/2010/main" val="608684808"/>
-      </p:ext>
-    </p:extLst>
-  </p:cSld>
-  <p:clrMapOvr>
-    <a:masterClrMapping/>
   </p:clrMapOvr>
 </p:sld>
 </file>
